--- a/Folien_Chantal.pptx
+++ b/Folien_Chantal.pptx
@@ -5,10 +5,10 @@
     <p:sldMasterId id="2147483707" r:id="rId2"/>
   </p:sldMasterIdLst>
   <p:notesMasterIdLst>
-    <p:notesMasterId r:id="rId9"/>
+    <p:notesMasterId r:id="rId11"/>
   </p:notesMasterIdLst>
   <p:handoutMasterIdLst>
-    <p:handoutMasterId r:id="rId10"/>
+    <p:handoutMasterId r:id="rId12"/>
   </p:handoutMasterIdLst>
   <p:sldIdLst>
     <p:sldId id="547" r:id="rId3"/>
@@ -17,20 +17,22 @@
     <p:sldId id="552" r:id="rId6"/>
     <p:sldId id="549" r:id="rId7"/>
     <p:sldId id="554" r:id="rId8"/>
+    <p:sldId id="555" r:id="rId9"/>
+    <p:sldId id="556" r:id="rId10"/>
   </p:sldIdLst>
   <p:sldSz cx="12192000" cy="6858000"/>
   <p:notesSz cx="7099300" cy="10234613"/>
   <p:embeddedFontLst>
     <p:embeddedFont>
       <p:font typeface="Arial Black" panose="020B0A04020102020204" pitchFamily="34" charset="0"/>
-      <p:bold r:id="rId11"/>
+      <p:bold r:id="rId13"/>
     </p:embeddedFont>
     <p:embeddedFont>
       <p:font typeface="Georgia" panose="02040502050405020303" pitchFamily="18" charset="0"/>
-      <p:regular r:id="rId12"/>
-      <p:bold r:id="rId13"/>
-      <p:italic r:id="rId14"/>
-      <p:boldItalic r:id="rId15"/>
+      <p:regular r:id="rId14"/>
+      <p:bold r:id="rId15"/>
+      <p:italic r:id="rId16"/>
+      <p:boldItalic r:id="rId17"/>
     </p:embeddedFont>
   </p:embeddedFontLst>
   <p:defaultTextStyle>
@@ -193,7 +195,7 @@
 <file path=ppt/revisionInfo.xml><?xml version="1.0" encoding="utf-8"?>
 <p1510:revInfo xmlns:a="http://schemas.openxmlformats.org/drawingml/2006/main" xmlns:r="http://schemas.openxmlformats.org/officeDocument/2006/relationships" xmlns:p1510="http://schemas.microsoft.com/office/powerpoint/2015/10/main">
   <p1510:revLst>
-    <p1510:client id="{8671CFD6-B536-4FBF-A75D-52BC1FF0B738}" v="4" dt="2026-05-08T12:14:42.960"/>
+    <p1510:client id="{8671CFD6-B536-4FBF-A75D-52BC1FF0B738}" v="6" dt="2026-05-08T12:53:14.238"/>
     <p1510:client id="{D61C2C5F-1EE8-40FC-AFD3-393E5DAC8020}" v="3" dt="2026-05-08T12:10:11.898"/>
   </p1510:revLst>
 </p1510:revInfo>
@@ -204,7 +206,7 @@
   <pc:docChgLst>
     <pc:chgData name="Chantal Fuchs" userId="64c95548b24869e7" providerId="LiveId" clId="{5B2B659D-95F1-4A73-A5BF-D6438C232F07}"/>
     <pc:docChg chg="custSel addSld delSld modSld">
-      <pc:chgData name="Chantal Fuchs" userId="64c95548b24869e7" providerId="LiveId" clId="{5B2B659D-95F1-4A73-A5BF-D6438C232F07}" dt="2026-05-08T12:16:16.771" v="446" actId="47"/>
+      <pc:chgData name="Chantal Fuchs" userId="64c95548b24869e7" providerId="LiveId" clId="{5B2B659D-95F1-4A73-A5BF-D6438C232F07}" dt="2026-05-08T12:53:28.827" v="471" actId="20577"/>
       <pc:docMkLst>
         <pc:docMk/>
       </pc:docMkLst>
@@ -461,6 +463,76 @@
             <pc:docMk/>
             <pc:sldMk cId="2427989588" sldId="554"/>
             <ac:picMk id="8" creationId="{32B786CB-F0B8-401A-D967-543B606038A5}"/>
+          </ac:picMkLst>
+        </pc:picChg>
+      </pc:sldChg>
+      <pc:sldChg chg="addSp delSp modSp add mod">
+        <pc:chgData name="Chantal Fuchs" userId="64c95548b24869e7" providerId="LiveId" clId="{5B2B659D-95F1-4A73-A5BF-D6438C232F07}" dt="2026-05-08T12:53:11.242" v="460" actId="20577"/>
+        <pc:sldMkLst>
+          <pc:docMk/>
+          <pc:sldMk cId="2007645637" sldId="555"/>
+        </pc:sldMkLst>
+        <pc:spChg chg="mod">
+          <ac:chgData name="Chantal Fuchs" userId="64c95548b24869e7" providerId="LiveId" clId="{5B2B659D-95F1-4A73-A5BF-D6438C232F07}" dt="2026-05-08T12:53:11.242" v="460" actId="20577"/>
+          <ac:spMkLst>
+            <pc:docMk/>
+            <pc:sldMk cId="2007645637" sldId="555"/>
+            <ac:spMk id="3" creationId="{0800C298-A6B7-A822-FCF9-F7E2C23F4404}"/>
+          </ac:spMkLst>
+        </pc:spChg>
+        <pc:spChg chg="del">
+          <ac:chgData name="Chantal Fuchs" userId="64c95548b24869e7" providerId="LiveId" clId="{5B2B659D-95F1-4A73-A5BF-D6438C232F07}" dt="2026-05-08T12:52:58.776" v="451" actId="478"/>
+          <ac:spMkLst>
+            <pc:docMk/>
+            <pc:sldMk cId="2007645637" sldId="555"/>
+            <ac:spMk id="7" creationId="{983A2E93-CE30-4E15-0BCE-BF7979867082}"/>
+          </ac:spMkLst>
+        </pc:spChg>
+        <pc:picChg chg="del">
+          <ac:chgData name="Chantal Fuchs" userId="64c95548b24869e7" providerId="LiveId" clId="{5B2B659D-95F1-4A73-A5BF-D6438C232F07}" dt="2026-05-08T12:52:48.641" v="448" actId="478"/>
+          <ac:picMkLst>
+            <pc:docMk/>
+            <pc:sldMk cId="2007645637" sldId="555"/>
+            <ac:picMk id="5" creationId="{EA5938BF-050A-BC88-AF84-FC0A38180B5A}"/>
+          </ac:picMkLst>
+        </pc:picChg>
+        <pc:picChg chg="add mod">
+          <ac:chgData name="Chantal Fuchs" userId="64c95548b24869e7" providerId="LiveId" clId="{5B2B659D-95F1-4A73-A5BF-D6438C232F07}" dt="2026-05-08T12:53:01.060" v="452" actId="1076"/>
+          <ac:picMkLst>
+            <pc:docMk/>
+            <pc:sldMk cId="2007645637" sldId="555"/>
+            <ac:picMk id="8" creationId="{A83F983D-DA2B-45C6-79AF-979C045963A6}"/>
+          </ac:picMkLst>
+        </pc:picChg>
+      </pc:sldChg>
+      <pc:sldChg chg="addSp delSp modSp add mod">
+        <pc:chgData name="Chantal Fuchs" userId="64c95548b24869e7" providerId="LiveId" clId="{5B2B659D-95F1-4A73-A5BF-D6438C232F07}" dt="2026-05-08T12:53:28.827" v="471" actId="20577"/>
+        <pc:sldMkLst>
+          <pc:docMk/>
+          <pc:sldMk cId="664867760" sldId="556"/>
+        </pc:sldMkLst>
+        <pc:spChg chg="mod">
+          <ac:chgData name="Chantal Fuchs" userId="64c95548b24869e7" providerId="LiveId" clId="{5B2B659D-95F1-4A73-A5BF-D6438C232F07}" dt="2026-05-08T12:53:28.827" v="471" actId="20577"/>
+          <ac:spMkLst>
+            <pc:docMk/>
+            <pc:sldMk cId="664867760" sldId="556"/>
+            <ac:spMk id="3" creationId="{0DED0AA7-812B-3DEE-11CB-76544B831455}"/>
+          </ac:spMkLst>
+        </pc:spChg>
+        <pc:picChg chg="add">
+          <ac:chgData name="Chantal Fuchs" userId="64c95548b24869e7" providerId="LiveId" clId="{5B2B659D-95F1-4A73-A5BF-D6438C232F07}" dt="2026-05-08T12:53:20.233" v="463" actId="22"/>
+          <ac:picMkLst>
+            <pc:docMk/>
+            <pc:sldMk cId="664867760" sldId="556"/>
+            <ac:picMk id="5" creationId="{8B418C00-453D-E8CA-B0F9-4964D04F2C87}"/>
+          </ac:picMkLst>
+        </pc:picChg>
+        <pc:picChg chg="del">
+          <ac:chgData name="Chantal Fuchs" userId="64c95548b24869e7" providerId="LiveId" clId="{5B2B659D-95F1-4A73-A5BF-D6438C232F07}" dt="2026-05-08T12:53:19.985" v="462" actId="478"/>
+          <ac:picMkLst>
+            <pc:docMk/>
+            <pc:sldMk cId="664867760" sldId="556"/>
+            <ac:picMk id="8" creationId="{2AD6620C-BCB4-261B-1B5B-D3947ED6C658}"/>
           </ac:picMkLst>
         </pc:picChg>
       </pc:sldChg>
@@ -36248,6 +36320,363 @@
 </p:sld>
 </file>
 
+<file path=ppt/slides/slide7.xml><?xml version="1.0" encoding="utf-8"?>
+<p:sld xmlns:a="http://schemas.openxmlformats.org/drawingml/2006/main" xmlns:r="http://schemas.openxmlformats.org/officeDocument/2006/relationships" xmlns:p="http://schemas.openxmlformats.org/presentationml/2006/main">
+  <p:cSld>
+    <p:spTree>
+      <p:nvGrpSpPr>
+        <p:cNvPr id="1" name="">
+          <a:extLst>
+            <a:ext uri="{FF2B5EF4-FFF2-40B4-BE49-F238E27FC236}">
+              <a16:creationId xmlns:a16="http://schemas.microsoft.com/office/drawing/2014/main" id="{8769F642-0607-5877-9476-77EFC0413F84}"/>
+            </a:ext>
+          </a:extLst>
+        </p:cNvPr>
+        <p:cNvGrpSpPr/>
+        <p:nvPr/>
+      </p:nvGrpSpPr>
+      <p:grpSpPr>
+        <a:xfrm>
+          <a:off x="0" y="0"/>
+          <a:ext cx="0" cy="0"/>
+          <a:chOff x="0" y="0"/>
+          <a:chExt cx="0" cy="0"/>
+        </a:xfrm>
+      </p:grpSpPr>
+      <p:sp>
+        <p:nvSpPr>
+          <p:cNvPr id="2" name="Foliennummernplatzhalter 1">
+            <a:extLst>
+              <a:ext uri="{FF2B5EF4-FFF2-40B4-BE49-F238E27FC236}">
+                <a16:creationId xmlns:a16="http://schemas.microsoft.com/office/drawing/2014/main" id="{BA1A9262-A1F2-2BC9-73D5-03734ED96C56}"/>
+              </a:ext>
+            </a:extLst>
+          </p:cNvPr>
+          <p:cNvSpPr>
+            <a:spLocks noGrp="1"/>
+          </p:cNvSpPr>
+          <p:nvPr>
+            <p:ph type="sldNum" sz="quarter" idx="12"/>
+          </p:nvPr>
+        </p:nvSpPr>
+        <p:spPr/>
+        <p:txBody>
+          <a:bodyPr/>
+          <a:lstStyle/>
+          <a:p>
+            <a:fld id="{0F8E3098-57A3-4D80-B720-D688A3E08C54}" type="slidenum">
+              <a:rPr lang="de-CH" smtClean="0"/>
+              <a:t>7</a:t>
+            </a:fld>
+            <a:endParaRPr lang="de-CH" dirty="0"/>
+          </a:p>
+        </p:txBody>
+      </p:sp>
+      <p:sp>
+        <p:nvSpPr>
+          <p:cNvPr id="3" name="Textplatzhalter 2">
+            <a:extLst>
+              <a:ext uri="{FF2B5EF4-FFF2-40B4-BE49-F238E27FC236}">
+                <a16:creationId xmlns:a16="http://schemas.microsoft.com/office/drawing/2014/main" id="{0800C298-A6B7-A822-FCF9-F7E2C23F4404}"/>
+              </a:ext>
+            </a:extLst>
+          </p:cNvPr>
+          <p:cNvSpPr>
+            <a:spLocks noGrp="1"/>
+          </p:cNvSpPr>
+          <p:nvPr>
+            <p:ph type="body" sz="quarter" idx="17"/>
+          </p:nvPr>
+        </p:nvSpPr>
+        <p:spPr>
+          <a:xfrm>
+            <a:off x="551384" y="5390744"/>
+            <a:ext cx="11161240" cy="765256"/>
+          </a:xfrm>
+        </p:spPr>
+        <p:txBody>
+          <a:bodyPr/>
+          <a:lstStyle/>
+          <a:p>
+            <a:r>
+              <a:rPr lang="en-GB" dirty="0"/>
+              <a:t>Sum of all production types vs. </a:t>
+            </a:r>
+            <a:r>
+              <a:rPr lang="en-GB" dirty="0" err="1"/>
+              <a:t>Swissgrid</a:t>
+            </a:r>
+            <a:endParaRPr lang="en-GB" dirty="0"/>
+          </a:p>
+          <a:p>
+            <a:r>
+              <a:rPr lang="en-GB" dirty="0" err="1"/>
+              <a:t>Explaines</a:t>
+            </a:r>
+            <a:r>
+              <a:rPr lang="en-GB" dirty="0"/>
+              <a:t> 72% of Variance (R²=0.72)</a:t>
+            </a:r>
+          </a:p>
+        </p:txBody>
+      </p:sp>
+      <p:sp>
+        <p:nvSpPr>
+          <p:cNvPr id="6" name="Titel 5">
+            <a:extLst>
+              <a:ext uri="{FF2B5EF4-FFF2-40B4-BE49-F238E27FC236}">
+                <a16:creationId xmlns:a16="http://schemas.microsoft.com/office/drawing/2014/main" id="{FC89E97D-8748-F1F2-4268-D2A2D74B507B}"/>
+              </a:ext>
+            </a:extLst>
+          </p:cNvPr>
+          <p:cNvSpPr>
+            <a:spLocks noGrp="1"/>
+          </p:cNvSpPr>
+          <p:nvPr>
+            <p:ph type="title"/>
+          </p:nvPr>
+        </p:nvSpPr>
+        <p:spPr/>
+        <p:txBody>
+          <a:bodyPr/>
+          <a:lstStyle/>
+          <a:p>
+            <a:r>
+              <a:rPr lang="en-GB" dirty="0" err="1"/>
+              <a:t>Swissgrid</a:t>
+            </a:r>
+            <a:r>
+              <a:rPr lang="en-GB" dirty="0"/>
+              <a:t> comparison</a:t>
+            </a:r>
+            <a:endParaRPr lang="de-CH" dirty="0"/>
+          </a:p>
+        </p:txBody>
+      </p:sp>
+      <p:pic>
+        <p:nvPicPr>
+          <p:cNvPr id="8" name="Grafik 7">
+            <a:extLst>
+              <a:ext uri="{FF2B5EF4-FFF2-40B4-BE49-F238E27FC236}">
+                <a16:creationId xmlns:a16="http://schemas.microsoft.com/office/drawing/2014/main" id="{A83F983D-DA2B-45C6-79AF-979C045963A6}"/>
+              </a:ext>
+            </a:extLst>
+          </p:cNvPr>
+          <p:cNvPicPr>
+            <a:picLocks noChangeAspect="1"/>
+          </p:cNvPicPr>
+          <p:nvPr/>
+        </p:nvPicPr>
+        <p:blipFill>
+          <a:blip r:embed="rId2"/>
+          <a:stretch>
+            <a:fillRect/>
+          </a:stretch>
+        </p:blipFill>
+        <p:spPr>
+          <a:xfrm>
+            <a:off x="36004" y="1549449"/>
+            <a:ext cx="12192000" cy="3759102"/>
+          </a:xfrm>
+          <a:prstGeom prst="rect">
+            <a:avLst/>
+          </a:prstGeom>
+        </p:spPr>
+      </p:pic>
+    </p:spTree>
+    <p:extLst>
+      <p:ext uri="{BB962C8B-B14F-4D97-AF65-F5344CB8AC3E}">
+        <p14:creationId xmlns:p14="http://schemas.microsoft.com/office/powerpoint/2010/main" val="2007645637"/>
+      </p:ext>
+    </p:extLst>
+  </p:cSld>
+  <p:clrMapOvr>
+    <a:masterClrMapping/>
+  </p:clrMapOvr>
+</p:sld>
+</file>
+
+<file path=ppt/slides/slide8.xml><?xml version="1.0" encoding="utf-8"?>
+<p:sld xmlns:a="http://schemas.openxmlformats.org/drawingml/2006/main" xmlns:r="http://schemas.openxmlformats.org/officeDocument/2006/relationships" xmlns:p="http://schemas.openxmlformats.org/presentationml/2006/main">
+  <p:cSld>
+    <p:spTree>
+      <p:nvGrpSpPr>
+        <p:cNvPr id="1" name="">
+          <a:extLst>
+            <a:ext uri="{FF2B5EF4-FFF2-40B4-BE49-F238E27FC236}">
+              <a16:creationId xmlns:a16="http://schemas.microsoft.com/office/drawing/2014/main" id="{B684B982-69BE-5778-4473-F140E8007B5B}"/>
+            </a:ext>
+          </a:extLst>
+        </p:cNvPr>
+        <p:cNvGrpSpPr/>
+        <p:nvPr/>
+      </p:nvGrpSpPr>
+      <p:grpSpPr>
+        <a:xfrm>
+          <a:off x="0" y="0"/>
+          <a:ext cx="0" cy="0"/>
+          <a:chOff x="0" y="0"/>
+          <a:chExt cx="0" cy="0"/>
+        </a:xfrm>
+      </p:grpSpPr>
+      <p:sp>
+        <p:nvSpPr>
+          <p:cNvPr id="2" name="Foliennummernplatzhalter 1">
+            <a:extLst>
+              <a:ext uri="{FF2B5EF4-FFF2-40B4-BE49-F238E27FC236}">
+                <a16:creationId xmlns:a16="http://schemas.microsoft.com/office/drawing/2014/main" id="{7AE75E80-D235-E068-2F9A-6E2FCFE63570}"/>
+              </a:ext>
+            </a:extLst>
+          </p:cNvPr>
+          <p:cNvSpPr>
+            <a:spLocks noGrp="1"/>
+          </p:cNvSpPr>
+          <p:nvPr>
+            <p:ph type="sldNum" sz="quarter" idx="12"/>
+          </p:nvPr>
+        </p:nvSpPr>
+        <p:spPr/>
+        <p:txBody>
+          <a:bodyPr/>
+          <a:lstStyle/>
+          <a:p>
+            <a:fld id="{0F8E3098-57A3-4D80-B720-D688A3E08C54}" type="slidenum">
+              <a:rPr lang="de-CH" smtClean="0"/>
+              <a:t>8</a:t>
+            </a:fld>
+            <a:endParaRPr lang="de-CH" dirty="0"/>
+          </a:p>
+        </p:txBody>
+      </p:sp>
+      <p:sp>
+        <p:nvSpPr>
+          <p:cNvPr id="3" name="Textplatzhalter 2">
+            <a:extLst>
+              <a:ext uri="{FF2B5EF4-FFF2-40B4-BE49-F238E27FC236}">
+                <a16:creationId xmlns:a16="http://schemas.microsoft.com/office/drawing/2014/main" id="{0DED0AA7-812B-3DEE-11CB-76544B831455}"/>
+              </a:ext>
+            </a:extLst>
+          </p:cNvPr>
+          <p:cNvSpPr>
+            <a:spLocks noGrp="1"/>
+          </p:cNvSpPr>
+          <p:nvPr>
+            <p:ph type="body" sz="quarter" idx="17"/>
+          </p:nvPr>
+        </p:nvSpPr>
+        <p:spPr>
+          <a:xfrm>
+            <a:off x="551384" y="5390744"/>
+            <a:ext cx="11161240" cy="765256"/>
+          </a:xfrm>
+        </p:spPr>
+        <p:txBody>
+          <a:bodyPr/>
+          <a:lstStyle/>
+          <a:p>
+            <a:r>
+              <a:rPr lang="en-GB" dirty="0"/>
+              <a:t>Sum of all production types vs. </a:t>
+            </a:r>
+            <a:r>
+              <a:rPr lang="en-GB" dirty="0" err="1"/>
+              <a:t>Swissgrid</a:t>
+            </a:r>
+            <a:endParaRPr lang="en-GB" dirty="0"/>
+          </a:p>
+          <a:p>
+            <a:r>
+              <a:rPr lang="en-GB" dirty="0" err="1"/>
+              <a:t>Explaines</a:t>
+            </a:r>
+            <a:r>
+              <a:rPr lang="en-GB" dirty="0"/>
+              <a:t> 60% of Variance </a:t>
+            </a:r>
+            <a:r>
+              <a:rPr lang="en-GB"/>
+              <a:t>(R²=0.60)</a:t>
+            </a:r>
+            <a:endParaRPr lang="en-GB" dirty="0"/>
+          </a:p>
+        </p:txBody>
+      </p:sp>
+      <p:sp>
+        <p:nvSpPr>
+          <p:cNvPr id="6" name="Titel 5">
+            <a:extLst>
+              <a:ext uri="{FF2B5EF4-FFF2-40B4-BE49-F238E27FC236}">
+                <a16:creationId xmlns:a16="http://schemas.microsoft.com/office/drawing/2014/main" id="{6AA5C0C2-8BC0-3B44-A2BB-777A24FCA3C1}"/>
+              </a:ext>
+            </a:extLst>
+          </p:cNvPr>
+          <p:cNvSpPr>
+            <a:spLocks noGrp="1"/>
+          </p:cNvSpPr>
+          <p:nvPr>
+            <p:ph type="title"/>
+          </p:nvPr>
+        </p:nvSpPr>
+        <p:spPr/>
+        <p:txBody>
+          <a:bodyPr/>
+          <a:lstStyle/>
+          <a:p>
+            <a:r>
+              <a:rPr lang="en-GB" dirty="0" err="1"/>
+              <a:t>Swissgrid</a:t>
+            </a:r>
+            <a:r>
+              <a:rPr lang="en-GB" dirty="0"/>
+              <a:t> comparison</a:t>
+            </a:r>
+            <a:endParaRPr lang="de-CH" dirty="0"/>
+          </a:p>
+        </p:txBody>
+      </p:sp>
+      <p:pic>
+        <p:nvPicPr>
+          <p:cNvPr id="5" name="Grafik 4">
+            <a:extLst>
+              <a:ext uri="{FF2B5EF4-FFF2-40B4-BE49-F238E27FC236}">
+                <a16:creationId xmlns:a16="http://schemas.microsoft.com/office/drawing/2014/main" id="{8B418C00-453D-E8CA-B0F9-4964D04F2C87}"/>
+              </a:ext>
+            </a:extLst>
+          </p:cNvPr>
+          <p:cNvPicPr>
+            <a:picLocks noChangeAspect="1"/>
+          </p:cNvPicPr>
+          <p:nvPr/>
+        </p:nvPicPr>
+        <p:blipFill>
+          <a:blip r:embed="rId2"/>
+          <a:stretch>
+            <a:fillRect/>
+          </a:stretch>
+        </p:blipFill>
+        <p:spPr>
+          <a:xfrm>
+            <a:off x="0" y="1549449"/>
+            <a:ext cx="12192000" cy="3759102"/>
+          </a:xfrm>
+          <a:prstGeom prst="rect">
+            <a:avLst/>
+          </a:prstGeom>
+        </p:spPr>
+      </p:pic>
+    </p:spTree>
+    <p:extLst>
+      <p:ext uri="{BB962C8B-B14F-4D97-AF65-F5344CB8AC3E}">
+        <p14:creationId xmlns:p14="http://schemas.microsoft.com/office/powerpoint/2010/main" val="664867760"/>
+      </p:ext>
+    </p:extLst>
+  </p:cSld>
+  <p:clrMapOvr>
+    <a:masterClrMapping/>
+  </p:clrMapOvr>
+</p:sld>
+</file>
+
 <file path=ppt/theme/theme1.xml><?xml version="1.0" encoding="utf-8"?>
 <a:theme xmlns:a="http://schemas.openxmlformats.org/drawingml/2006/main" name="BFE-Praesentation">
   <a:themeElements>
